--- a/modulo-03/03.02 - Criando Tabelas de Banco de Dados (Source-Based)/03.02_Criando_tabelas_de_banco_de_dados.pptx
+++ b/modulo-03/03.02 - Criando Tabelas de Banco de Dados (Source-Based)/03.02_Criando_tabelas_de_banco_de_dados.pptx
@@ -1906,7 +1906,7 @@
                   <a:srgbClr val="8FA3C7"/>
                 </a:solidFill>
               </a:rPr>
-              <a:t>ABAP Moderno · Módulo 02 — Modelagem de Dados com Dicionário e CDS  ·  Aula 2 de 7 — Tabelas de banco</a:t>
+              <a:t>ABAP Moderno · Módulo 03 — Modelagem de Dados com Dicionário e CDS  ·  Aula 2 de 7 — Tabelas de banco</a:t>
             </a:r>
             <a:endParaRPr lang="en-US" sz="900" dirty="0"/>
           </a:p>
@@ -2052,7 +2052,7 @@
                   <a:srgbClr val="556B82"/>
                 </a:solidFill>
               </a:rPr>
-              <a:t>ABAP Moderno · Módulo 02 — Modelagem de Dados com Dicionário e CDS  ·  Aula 2 de 7 — Tabelas de banco</a:t>
+              <a:t>ABAP Moderno · Módulo 03 — Modelagem de Dados com Dicionário e CDS  ·  Aula 2 de 7 — Tabelas de banco</a:t>
             </a:r>
             <a:endParaRPr lang="en-US" sz="900" dirty="0"/>
           </a:p>
@@ -2483,7 +2483,7 @@
                   <a:srgbClr val="89D1FF"/>
                 </a:solidFill>
               </a:rPr>
-              <a:t>MÓDULO 02 · AULA 02 DE 07</a:t>
+              <a:t>MÓDULO 03 · AULA 02 DE 07</a:t>
             </a:r>
             <a:endParaRPr lang="en-US" sz="1400" dirty="0"/>
           </a:p>
@@ -2825,7 +2825,7 @@
                   <a:srgbClr val="8FA3C7"/>
                 </a:solidFill>
               </a:rPr>
-              <a:t>ABAP Moderno · Módulo 02 — Modelagem de Dados com Dicionário e CDS · Design System SAP Horizon</a:t>
+              <a:t>ABAP Moderno · Módulo 03 — Modelagem de Dados com Dicionário e CDS · Design System SAP Horizon</a:t>
             </a:r>
             <a:endParaRPr lang="en-US" sz="1100" dirty="0"/>
           </a:p>
@@ -2932,7 +2932,7 @@
                   <a:srgbClr val="89D1FF"/>
                 </a:solidFill>
               </a:rPr>
-              <a:t>AULA 02.02 · SEÇÃO 3</a:t>
+              <a:t>AULA 03.02 · SEÇÃO 3</a:t>
             </a:r>
             <a:endParaRPr lang="en-US" sz="1300" dirty="0"/>
           </a:p>
@@ -4324,7 +4324,7 @@
                   <a:srgbClr val="89D1FF"/>
                 </a:solidFill>
               </a:rPr>
-              <a:t>AULA 02.02 · SEÇÃO 4</a:t>
+              <a:t>AULA 03.02 · SEÇÃO 4</a:t>
             </a:r>
             <a:endParaRPr lang="en-US" sz="1300" dirty="0"/>
           </a:p>
@@ -5132,7 +5132,7 @@
         </p:blipFill>
         <p:spPr>
           <a:xfrm>
-            <a:off x="850392" y="3036316"/>
+            <a:off x="4624730" y="3036316"/>
             <a:ext cx="256032" cy="256032"/>
           </a:xfrm>
           <a:prstGeom prst="rect">
@@ -5156,7 +5156,7 @@
         </p:blipFill>
         <p:spPr>
           <a:xfrm>
-            <a:off x="4624730" y="3036316"/>
+            <a:off x="850392" y="3036316"/>
             <a:ext cx="256032" cy="256032"/>
           </a:xfrm>
           <a:prstGeom prst="rect">
@@ -6161,7 +6161,7 @@
         </p:blipFill>
         <p:spPr>
           <a:xfrm>
-            <a:off x="5446624" y="3241548"/>
+            <a:off x="8270519" y="3241548"/>
             <a:ext cx="329184" cy="329184"/>
           </a:xfrm>
           <a:prstGeom prst="rect">
@@ -6185,7 +6185,7 @@
         </p:blipFill>
         <p:spPr>
           <a:xfrm>
-            <a:off x="8270519" y="3241548"/>
+            <a:off x="5446624" y="3241548"/>
             <a:ext cx="329184" cy="329184"/>
           </a:xfrm>
           <a:prstGeom prst="rect">
@@ -6377,7 +6377,7 @@
                   <a:srgbClr val="FFFFFF"/>
                 </a:solidFill>
               </a:rPr>
-              <a:t>O que aprendemos na aula 02.02</a:t>
+              <a:t>O que aprendemos na aula 03.02</a:t>
             </a:r>
             <a:endParaRPr lang="en-US" sz="3200" dirty="0"/>
           </a:p>
@@ -6948,7 +6948,7 @@
                   <a:srgbClr val="89D1FF"/>
                 </a:solidFill>
               </a:rPr>
-              <a:t>Próxima aula · 02.03  </a:t>
+              <a:t>Próxima aula · 03.03  </a:t>
             </a:r>
             <a:r>
               <a:rPr lang="en-US" sz="1500" dirty="0">
@@ -7225,7 +7225,7 @@
                   <a:srgbClr val="1D2D3E"/>
                 </a:solidFill>
               </a:rPr>
-              <a:t>Módulo 02 em 7 aulas: Dicionário e CDS</a:t>
+              <a:t>Módulo 03 em 7 aulas: Dicionário e CDS</a:t>
             </a:r>
             <a:endParaRPr lang="en-US" sz="2800" dirty="0"/>
           </a:p>
@@ -8483,7 +8483,7 @@
                   <a:srgbClr val="1D2D3E"/>
                 </a:solidFill>
               </a:rPr>
-              <a:t>criamos uma tabela de funcionários do zero, com data elements, valores monetários e campos administrativos, e alteramos sem perder dados.</a:t>
+              <a:t>montamos uma tabela como a de pedidos do projeto Pedidos de Compras, com chave, valores monetários e campos administrativos, e alteramos sem perder dados.</a:t>
             </a:r>
             <a:endParaRPr lang="en-US" sz="1400" dirty="0"/>
           </a:p>
@@ -8505,7 +8505,7 @@
         </p:blipFill>
         <p:spPr>
           <a:xfrm>
-            <a:off x="5455768" y="1847088"/>
+            <a:off x="5455768" y="3858768"/>
             <a:ext cx="347472" cy="347472"/>
           </a:xfrm>
           <a:prstGeom prst="rect">
@@ -8529,7 +8529,7 @@
         </p:blipFill>
         <p:spPr>
           <a:xfrm>
-            <a:off x="8275091" y="1847088"/>
+            <a:off x="2636444" y="1847088"/>
             <a:ext cx="347472" cy="347472"/>
           </a:xfrm>
           <a:prstGeom prst="rect">
@@ -8553,7 +8553,7 @@
         </p:blipFill>
         <p:spPr>
           <a:xfrm>
-            <a:off x="2636444" y="1847088"/>
+            <a:off x="5455768" y="1847088"/>
             <a:ext cx="347472" cy="347472"/>
           </a:xfrm>
           <a:prstGeom prst="rect">
@@ -8577,7 +8577,7 @@
         </p:blipFill>
         <p:spPr>
           <a:xfrm>
-            <a:off x="11094415" y="1847088"/>
+            <a:off x="8275091" y="1847088"/>
             <a:ext cx="347472" cy="347472"/>
           </a:xfrm>
           <a:prstGeom prst="rect">
@@ -8601,7 +8601,7 @@
         </p:blipFill>
         <p:spPr>
           <a:xfrm>
-            <a:off x="5455768" y="3858768"/>
+            <a:off x="11094415" y="1847088"/>
             <a:ext cx="347472" cy="347472"/>
           </a:xfrm>
           <a:prstGeom prst="rect">
@@ -8625,7 +8625,7 @@
         </p:blipFill>
         <p:spPr>
           <a:xfrm>
-            <a:off x="8275091" y="3858768"/>
+            <a:off x="2636444" y="3858768"/>
             <a:ext cx="347472" cy="347472"/>
           </a:xfrm>
           <a:prstGeom prst="rect">
@@ -8649,8 +8649,8 @@
         </p:blipFill>
         <p:spPr>
           <a:xfrm>
-            <a:off x="2636444" y="3858768"/>
-            <a:ext cx="347472" cy="347472"/>
+            <a:off x="749808" y="5751576"/>
+            <a:ext cx="310896" cy="310896"/>
           </a:xfrm>
           <a:prstGeom prst="rect">
             <a:avLst/>
@@ -8673,8 +8673,8 @@
         </p:blipFill>
         <p:spPr>
           <a:xfrm>
-            <a:off x="749808" y="5751576"/>
-            <a:ext cx="310896" cy="310896"/>
+            <a:off x="8275091" y="3858768"/>
+            <a:ext cx="347472" cy="347472"/>
           </a:xfrm>
           <a:prstGeom prst="rect">
             <a:avLst/>
@@ -9332,7 +9332,7 @@
         </p:blipFill>
         <p:spPr>
           <a:xfrm>
-            <a:off x="4624730" y="3043047"/>
+            <a:off x="8399069" y="3043047"/>
             <a:ext cx="256032" cy="256032"/>
           </a:xfrm>
           <a:prstGeom prst="rect">
@@ -9356,8 +9356,8 @@
         </p:blipFill>
         <p:spPr>
           <a:xfrm>
-            <a:off x="8399069" y="3043047"/>
-            <a:ext cx="256032" cy="256032"/>
+            <a:off x="749808" y="5186553"/>
+            <a:ext cx="310896" cy="310896"/>
           </a:xfrm>
           <a:prstGeom prst="rect">
             <a:avLst/>
@@ -9404,8 +9404,8 @@
         </p:blipFill>
         <p:spPr>
           <a:xfrm>
-            <a:off x="749808" y="5186553"/>
-            <a:ext cx="310896" cy="310896"/>
+            <a:off x="4624730" y="3043047"/>
+            <a:ext cx="256032" cy="256032"/>
           </a:xfrm>
           <a:prstGeom prst="rect">
             <a:avLst/>
@@ -9534,7 +9534,7 @@
                   <a:srgbClr val="89D1FF"/>
                 </a:solidFill>
               </a:rPr>
-              <a:t>AULA 02.02 · SEÇÃO 1</a:t>
+              <a:t>AULA 03.02 · SEÇÃO 1</a:t>
             </a:r>
             <a:endParaRPr lang="en-US" sz="1300" dirty="0"/>
           </a:p>
@@ -9971,7 +9971,7 @@
                   <a:srgbClr val="0064D9"/>
                 </a:solidFill>
               </a:rPr>
-              <a:t>DEFINIÇÃO · TABELA DE FUNCIONÁRIOS</a:t>
+              <a:t>DEFINIÇÃO · TABELA DE PEDIDOS</a:t>
             </a:r>
             <a:endParaRPr lang="en-US" sz="1100" dirty="0"/>
           </a:p>
@@ -10009,7 +10009,7 @@
                   <a:srgbClr val="1D2D3E"/>
                 </a:solidFill>
               </a:rPr>
-              <a:t>Chave, data elements e include de campos</a:t>
+              <a:t>Chave, tipos e campos administrativos</a:t>
             </a:r>
             <a:endParaRPr lang="en-US" sz="2800" dirty="0"/>
           </a:p>
@@ -10073,7 +10073,7 @@
         <p:spPr>
           <a:xfrm>
             <a:off x="640080" y="1700784"/>
-            <a:ext cx="2231136" cy="292608"/>
+            <a:ext cx="2153412" cy="292608"/>
           </a:xfrm>
           <a:prstGeom prst="rect">
             <a:avLst/>
@@ -10093,7 +10093,7 @@
         <p:spPr>
           <a:xfrm>
             <a:off x="640080" y="1700784"/>
-            <a:ext cx="2231136" cy="27432"/>
+            <a:ext cx="2153412" cy="27432"/>
           </a:xfrm>
           <a:prstGeom prst="rect">
             <a:avLst/>
@@ -10113,7 +10113,7 @@
         <p:spPr>
           <a:xfrm>
             <a:off x="731520" y="1719072"/>
-            <a:ext cx="2048256" cy="274320"/>
+            <a:ext cx="1970532" cy="274320"/>
           </a:xfrm>
           <a:prstGeom prst="rect">
             <a:avLst/>
@@ -10134,7 +10134,7 @@
                   <a:srgbClr val="FFFFFF"/>
                 </a:solidFill>
               </a:rPr>
-              <a:t>zs4d430_employ.tabl.abap</a:t>
+              <a:t>zta_pc_pedido.tabl.abap</a:t>
             </a:r>
             <a:endParaRPr lang="en-US" sz="950" dirty="0"/>
           </a:p>
@@ -10170,7 +10170,7 @@
                   <a:srgbClr val="9DA5B4"/>
                 </a:solidFill>
               </a:rPr>
-              <a:t>ZS4D430_## › Dictionary › Database Tables</a:t>
+              <a:t>ZAVBS_PC_PEDIDOS › ZTA_PC_PEDIDO (simplificada)</a:t>
             </a:r>
             <a:endParaRPr lang="en-US" sz="850" dirty="0"/>
           </a:p>
@@ -10516,6 +10516,26 @@
             </a:r>
             <a:endParaRPr lang="en-US" sz="950" dirty="0"/>
           </a:p>
+          <a:p>
+            <a:pPr algn="r" indent="0" marL="0">
+              <a:lnSpc>
+                <a:spcPct val="105000"/>
+              </a:lnSpc>
+              <a:buNone/>
+            </a:pPr>
+            <a:r>
+              <a:rPr lang="en-US" sz="950" dirty="0">
+                <a:solidFill>
+                  <a:srgbClr val="6E7681"/>
+                </a:solidFill>
+                <a:latin typeface="Courier New" pitchFamily="34" charset="0"/>
+                <a:ea typeface="Courier New" pitchFamily="34" charset="-122"/>
+                <a:cs typeface="Courier New" pitchFamily="34" charset="-120"/>
+              </a:rPr>
+              <a:t>17</a:t>
+            </a:r>
+            <a:endParaRPr lang="en-US" sz="950" dirty="0"/>
+          </a:p>
         </p:txBody>
       </p:sp>
       <p:sp>
@@ -10598,7 +10618,7 @@
                 <a:ea typeface="Courier New" pitchFamily="34" charset="-122"/>
                 <a:cs typeface="Courier New" pitchFamily="34" charset="-120"/>
               </a:rPr>
-              <a:t>'Employees'</a:t>
+              <a:t>'Pedido de compra'</a:t>
             </a:r>
             <a:endParaRPr lang="en-US" sz="950" dirty="0"/>
           </a:p>
@@ -10918,7 +10938,7 @@
                 <a:ea typeface="Courier New" pitchFamily="34" charset="-122"/>
                 <a:cs typeface="Courier New" pitchFamily="34" charset="-120"/>
               </a:rPr>
-              <a:t>zs4d430_employ</a:t>
+              <a:t>zta_pc_pedido</a:t>
             </a:r>
             <a:r>
               <a:rPr lang="en-US" sz="950" dirty="0">
@@ -11167,7 +11187,7 @@
                 <a:ea typeface="Courier New" pitchFamily="34" charset="-122"/>
                 <a:cs typeface="Courier New" pitchFamily="34" charset="-120"/>
               </a:rPr>
-              <a:t>employee_id</a:t>
+              <a:t>pedido_uuid</a:t>
             </a:r>
             <a:r>
               <a:rPr lang="en-US" sz="950" dirty="0">
@@ -11211,7 +11231,7 @@
                 <a:ea typeface="Courier New" pitchFamily="34" charset="-122"/>
                 <a:cs typeface="Courier New" pitchFamily="34" charset="-120"/>
               </a:rPr>
-              <a:t>zs4d430_employee_id</a:t>
+              <a:t>sysuuid_x16</a:t>
             </a:r>
             <a:r>
               <a:rPr lang="en-US" sz="950" dirty="0">
@@ -11297,7 +11317,7 @@
                 <a:ea typeface="Courier New" pitchFamily="34" charset="-122"/>
                 <a:cs typeface="Courier New" pitchFamily="34" charset="-120"/>
               </a:rPr>
-              <a:t>first_name</a:t>
+              <a:t>numero_pedido</a:t>
             </a:r>
             <a:r>
               <a:rPr lang="en-US" sz="950" dirty="0">
@@ -11308,7 +11328,7 @@
                 <a:ea typeface="Courier New" pitchFamily="34" charset="-122"/>
                 <a:cs typeface="Courier New" pitchFamily="34" charset="-120"/>
               </a:rPr>
-              <a:t>      </a:t>
+              <a:t>   </a:t>
             </a:r>
             <a:r>
               <a:rPr lang="en-US" sz="950" dirty="0">
@@ -11341,7 +11361,62 @@
                 <a:ea typeface="Courier New" pitchFamily="34" charset="-122"/>
                 <a:cs typeface="Courier New" pitchFamily="34" charset="-120"/>
               </a:rPr>
-              <a:t>zs4d430_first_name</a:t>
+              <a:t>abap</a:t>
+            </a:r>
+            <a:r>
+              <a:rPr lang="en-US" sz="950" dirty="0">
+                <a:solidFill>
+                  <a:srgbClr val="CCCCCC"/>
+                </a:solidFill>
+                <a:latin typeface="Courier New" pitchFamily="34" charset="0"/>
+                <a:ea typeface="Courier New" pitchFamily="34" charset="-122"/>
+                <a:cs typeface="Courier New" pitchFamily="34" charset="-120"/>
+              </a:rPr>
+              <a:t>.</a:t>
+            </a:r>
+            <a:r>
+              <a:rPr lang="en-US" sz="950" dirty="0">
+                <a:solidFill>
+                  <a:srgbClr val="DCDCAA"/>
+                </a:solidFill>
+                <a:latin typeface="Courier New" pitchFamily="34" charset="0"/>
+                <a:ea typeface="Courier New" pitchFamily="34" charset="-122"/>
+                <a:cs typeface="Courier New" pitchFamily="34" charset="-120"/>
+              </a:rPr>
+              <a:t>char</a:t>
+            </a:r>
+            <a:r>
+              <a:rPr lang="en-US" sz="950" dirty="0">
+                <a:solidFill>
+                  <a:srgbClr val="CCCCCC"/>
+                </a:solidFill>
+                <a:latin typeface="Courier New" pitchFamily="34" charset="0"/>
+                <a:ea typeface="Courier New" pitchFamily="34" charset="-122"/>
+                <a:cs typeface="Courier New" pitchFamily="34" charset="-120"/>
+              </a:rPr>
+              <a:t>(</a:t>
+            </a:r>
+            <a:r>
+              <a:rPr lang="en-US" sz="950" dirty="0">
+                <a:solidFill>
+                  <a:srgbClr val="B5CEA8"/>
+                </a:solidFill>
+                <a:latin typeface="Courier New" pitchFamily="34" charset="0"/>
+                <a:ea typeface="Courier New" pitchFamily="34" charset="-122"/>
+                <a:cs typeface="Courier New" pitchFamily="34" charset="-120"/>
+              </a:rPr>
+              <a:t>10</a:t>
+            </a:r>
+            <a:r>
+              <a:rPr lang="en-US" sz="950" dirty="0">
+                <a:solidFill>
+                  <a:srgbClr val="CCCCCC"/>
+                </a:solidFill>
+                <a:latin typeface="Courier New" pitchFamily="34" charset="0"/>
+                <a:ea typeface="Courier New" pitchFamily="34" charset="-122"/>
+                <a:cs typeface="Courier New" pitchFamily="34" charset="-120"/>
+              </a:rPr>
+              <a:t>)</a:t>
             </a:r>
             <a:r>
               <a:rPr lang="en-US" sz="950" dirty="0">
@@ -11383,7 +11458,7 @@
                 <a:ea typeface="Courier New" pitchFamily="34" charset="-122"/>
                 <a:cs typeface="Courier New" pitchFamily="34" charset="-120"/>
               </a:rPr>
-              <a:t>last_name</a:t>
+              <a:t>cliente_uuid</a:t>
             </a:r>
             <a:r>
               <a:rPr lang="en-US" sz="950" dirty="0">
@@ -11394,7 +11469,7 @@
                 <a:ea typeface="Courier New" pitchFamily="34" charset="-122"/>
                 <a:cs typeface="Courier New" pitchFamily="34" charset="-120"/>
               </a:rPr>
-              <a:t>       </a:t>
+              <a:t>    </a:t>
             </a:r>
             <a:r>
               <a:rPr lang="en-US" sz="950" dirty="0">
@@ -11427,7 +11502,7 @@
                 <a:ea typeface="Courier New" pitchFamily="34" charset="-122"/>
                 <a:cs typeface="Courier New" pitchFamily="34" charset="-120"/>
               </a:rPr>
-              <a:t>zs4d430_last_name</a:t>
+              <a:t>sysuuid_x16</a:t>
             </a:r>
             <a:r>
               <a:rPr lang="en-US" sz="950" dirty="0">
@@ -11469,7 +11544,7 @@
                 <a:ea typeface="Courier New" pitchFamily="34" charset="-122"/>
                 <a:cs typeface="Courier New" pitchFamily="34" charset="-120"/>
               </a:rPr>
-              <a:t>department_id</a:t>
+              <a:t>status_pedido</a:t>
             </a:r>
             <a:r>
               <a:rPr lang="en-US" sz="950" dirty="0">
@@ -11513,7 +11588,62 @@
                 <a:ea typeface="Courier New" pitchFamily="34" charset="-122"/>
                 <a:cs typeface="Courier New" pitchFamily="34" charset="-120"/>
               </a:rPr>
-              <a:t>zs4d430_department_id</a:t>
+              <a:t>abap</a:t>
+            </a:r>
+            <a:r>
+              <a:rPr lang="en-US" sz="950" dirty="0">
+                <a:solidFill>
+                  <a:srgbClr val="CCCCCC"/>
+                </a:solidFill>
+                <a:latin typeface="Courier New" pitchFamily="34" charset="0"/>
+                <a:ea typeface="Courier New" pitchFamily="34" charset="-122"/>
+                <a:cs typeface="Courier New" pitchFamily="34" charset="-120"/>
+              </a:rPr>
+              <a:t>.</a:t>
+            </a:r>
+            <a:r>
+              <a:rPr lang="en-US" sz="950" dirty="0">
+                <a:solidFill>
+                  <a:srgbClr val="DCDCAA"/>
+                </a:solidFill>
+                <a:latin typeface="Courier New" pitchFamily="34" charset="0"/>
+                <a:ea typeface="Courier New" pitchFamily="34" charset="-122"/>
+                <a:cs typeface="Courier New" pitchFamily="34" charset="-120"/>
+              </a:rPr>
+              <a:t>char</a:t>
+            </a:r>
+            <a:r>
+              <a:rPr lang="en-US" sz="950" dirty="0">
+                <a:solidFill>
+                  <a:srgbClr val="CCCCCC"/>
+                </a:solidFill>
+                <a:latin typeface="Courier New" pitchFamily="34" charset="0"/>
+                <a:ea typeface="Courier New" pitchFamily="34" charset="-122"/>
+                <a:cs typeface="Courier New" pitchFamily="34" charset="-120"/>
+              </a:rPr>
+              <a:t>(</a:t>
+            </a:r>
+            <a:r>
+              <a:rPr lang="en-US" sz="950" dirty="0">
+                <a:solidFill>
+                  <a:srgbClr val="B5CEA8"/>
+                </a:solidFill>
+                <a:latin typeface="Courier New" pitchFamily="34" charset="0"/>
+                <a:ea typeface="Courier New" pitchFamily="34" charset="-122"/>
+                <a:cs typeface="Courier New" pitchFamily="34" charset="-120"/>
+              </a:rPr>
+              <a:t>40</a:t>
+            </a:r>
+            <a:r>
+              <a:rPr lang="en-US" sz="950" dirty="0">
+                <a:solidFill>
+                  <a:srgbClr val="CCCCCC"/>
+                </a:solidFill>
+                <a:latin typeface="Courier New" pitchFamily="34" charset="0"/>
+                <a:ea typeface="Courier New" pitchFamily="34" charset="-122"/>
+                <a:cs typeface="Courier New" pitchFamily="34" charset="-120"/>
+              </a:rPr>
+              <a:t>)</a:t>
             </a:r>
             <a:r>
               <a:rPr lang="en-US" sz="950" dirty="0">
@@ -11549,13 +11679,13 @@
             <a:r>
               <a:rPr lang="en-US" sz="950" dirty="0">
                 <a:solidFill>
-                  <a:srgbClr val="4EC9B0"/>
-                </a:solidFill>
-                <a:latin typeface="Courier New" pitchFamily="34" charset="0"/>
-                <a:ea typeface="Courier New" pitchFamily="34" charset="-122"/>
-                <a:cs typeface="Courier New" pitchFamily="34" charset="-120"/>
-              </a:rPr>
-              <a:t>@Semantics.amount.currencyCode</a:t>
+                  <a:srgbClr val="CCCCCC"/>
+                </a:solidFill>
+                <a:latin typeface="Courier New" pitchFamily="34" charset="0"/>
+                <a:ea typeface="Courier New" pitchFamily="34" charset="-122"/>
+                <a:cs typeface="Courier New" pitchFamily="34" charset="-120"/>
+              </a:rPr>
+              <a:t>currency</a:t>
             </a:r>
             <a:r>
               <a:rPr lang="en-US" sz="950" dirty="0">
@@ -11566,6 +11696,28 @@
                 <a:ea typeface="Courier New" pitchFamily="34" charset="-122"/>
                 <a:cs typeface="Courier New" pitchFamily="34" charset="-120"/>
               </a:rPr>
+              <a:t>        </a:t>
+            </a:r>
+            <a:r>
+              <a:rPr lang="en-US" sz="950" dirty="0">
+                <a:solidFill>
+                  <a:srgbClr val="CCCCCC"/>
+                </a:solidFill>
+                <a:latin typeface="Courier New" pitchFamily="34" charset="0"/>
+                <a:ea typeface="Courier New" pitchFamily="34" charset="-122"/>
+                <a:cs typeface="Courier New" pitchFamily="34" charset="-120"/>
+              </a:rPr>
+              <a:t>:</a:t>
+            </a:r>
+            <a:r>
+              <a:rPr lang="en-US" sz="950" dirty="0">
+                <a:solidFill>
+                  <a:srgbClr val="CCCCCC"/>
+                </a:solidFill>
+                <a:latin typeface="Courier New" pitchFamily="34" charset="0"/>
+                <a:ea typeface="Courier New" pitchFamily="34" charset="-122"/>
+                <a:cs typeface="Courier New" pitchFamily="34" charset="-120"/>
+              </a:rPr>
               <a:t> </a:t>
             </a:r>
             <a:r>
@@ -11577,7 +11729,7 @@
                 <a:ea typeface="Courier New" pitchFamily="34" charset="-122"/>
                 <a:cs typeface="Courier New" pitchFamily="34" charset="-120"/>
               </a:rPr>
-              <a:t>:</a:t>
+              <a:t>abap</a:t>
             </a:r>
             <a:r>
               <a:rPr lang="en-US" sz="950" dirty="0">
@@ -11588,18 +11740,29 @@
                 <a:ea typeface="Courier New" pitchFamily="34" charset="-122"/>
                 <a:cs typeface="Courier New" pitchFamily="34" charset="-120"/>
               </a:rPr>
-              <a:t> </a:t>
+              <a:t>.</a:t>
             </a:r>
             <a:r>
               <a:rPr lang="en-US" sz="950" dirty="0">
                 <a:solidFill>
-                  <a:srgbClr val="CE9178"/>
-                </a:solidFill>
-                <a:latin typeface="Courier New" pitchFamily="34" charset="0"/>
-                <a:ea typeface="Courier New" pitchFamily="34" charset="-122"/>
-                <a:cs typeface="Courier New" pitchFamily="34" charset="-120"/>
-              </a:rPr>
-              <a:t>'zs4d430_employ.currency_code'</a:t>
+                  <a:srgbClr val="CCCCCC"/>
+                </a:solidFill>
+                <a:latin typeface="Courier New" pitchFamily="34" charset="0"/>
+                <a:ea typeface="Courier New" pitchFamily="34" charset="-122"/>
+                <a:cs typeface="Courier New" pitchFamily="34" charset="-120"/>
+              </a:rPr>
+              <a:t>cuky</a:t>
+            </a:r>
+            <a:r>
+              <a:rPr lang="en-US" sz="950" dirty="0">
+                <a:solidFill>
+                  <a:srgbClr val="CCCCCC"/>
+                </a:solidFill>
+                <a:latin typeface="Courier New" pitchFamily="34" charset="0"/>
+                <a:ea typeface="Courier New" pitchFamily="34" charset="-122"/>
+                <a:cs typeface="Courier New" pitchFamily="34" charset="-120"/>
+              </a:rPr>
+              <a:t>;</a:t>
             </a:r>
             <a:endParaRPr lang="en-US" sz="950" dirty="0"/>
           </a:p>
@@ -11624,13 +11787,13 @@
             <a:r>
               <a:rPr lang="en-US" sz="950" dirty="0">
                 <a:solidFill>
-                  <a:srgbClr val="CCCCCC"/>
-                </a:solidFill>
-                <a:latin typeface="Courier New" pitchFamily="34" charset="0"/>
-                <a:ea typeface="Courier New" pitchFamily="34" charset="-122"/>
-                <a:cs typeface="Courier New" pitchFamily="34" charset="-120"/>
-              </a:rPr>
-              <a:t>annual_salary</a:t>
+                  <a:srgbClr val="4EC9B0"/>
+                </a:solidFill>
+                <a:latin typeface="Courier New" pitchFamily="34" charset="0"/>
+                <a:ea typeface="Courier New" pitchFamily="34" charset="-122"/>
+                <a:cs typeface="Courier New" pitchFamily="34" charset="-120"/>
+              </a:rPr>
+              <a:t>@Semantics.amount.currencyCode</a:t>
             </a:r>
             <a:r>
               <a:rPr lang="en-US" sz="950" dirty="0">
@@ -11641,7 +11804,7 @@
                 <a:ea typeface="Courier New" pitchFamily="34" charset="-122"/>
                 <a:cs typeface="Courier New" pitchFamily="34" charset="-120"/>
               </a:rPr>
-              <a:t>   </a:t>
+              <a:t> </a:t>
             </a:r>
             <a:r>
               <a:rPr lang="en-US" sz="950" dirty="0">
@@ -11668,24 +11831,13 @@
             <a:r>
               <a:rPr lang="en-US" sz="950" dirty="0">
                 <a:solidFill>
-                  <a:srgbClr val="CCCCCC"/>
-                </a:solidFill>
-                <a:latin typeface="Courier New" pitchFamily="34" charset="0"/>
-                <a:ea typeface="Courier New" pitchFamily="34" charset="-122"/>
-                <a:cs typeface="Courier New" pitchFamily="34" charset="-120"/>
-              </a:rPr>
-              <a:t>zs4d430_salary</a:t>
-            </a:r>
-            <a:r>
-              <a:rPr lang="en-US" sz="950" dirty="0">
-                <a:solidFill>
-                  <a:srgbClr val="CCCCCC"/>
-                </a:solidFill>
-                <a:latin typeface="Courier New" pitchFamily="34" charset="0"/>
-                <a:ea typeface="Courier New" pitchFamily="34" charset="-122"/>
-                <a:cs typeface="Courier New" pitchFamily="34" charset="-120"/>
-              </a:rPr>
-              <a:t>;</a:t>
+                  <a:srgbClr val="CE9178"/>
+                </a:solidFill>
+                <a:latin typeface="Courier New" pitchFamily="34" charset="0"/>
+                <a:ea typeface="Courier New" pitchFamily="34" charset="-122"/>
+                <a:cs typeface="Courier New" pitchFamily="34" charset="-120"/>
+              </a:rPr>
+              <a:t>'zta_pc_pedido.currency'</a:t>
             </a:r>
             <a:endParaRPr lang="en-US" sz="950" dirty="0"/>
           </a:p>
@@ -11716,7 +11868,7 @@
                 <a:ea typeface="Courier New" pitchFamily="34" charset="-122"/>
                 <a:cs typeface="Courier New" pitchFamily="34" charset="-120"/>
               </a:rPr>
-              <a:t>currency_code</a:t>
+              <a:t>valor_total</a:t>
             </a:r>
             <a:r>
               <a:rPr lang="en-US" sz="950" dirty="0">
@@ -11727,7 +11879,7 @@
                 <a:ea typeface="Courier New" pitchFamily="34" charset="-122"/>
                 <a:cs typeface="Courier New" pitchFamily="34" charset="-120"/>
               </a:rPr>
-              <a:t>   </a:t>
+              <a:t>     </a:t>
             </a:r>
             <a:r>
               <a:rPr lang="en-US" sz="950" dirty="0">
@@ -11776,13 +11928,68 @@
             <a:r>
               <a:rPr lang="en-US" sz="950" dirty="0">
                 <a:solidFill>
-                  <a:srgbClr val="CCCCCC"/>
-                </a:solidFill>
-                <a:latin typeface="Courier New" pitchFamily="34" charset="0"/>
-                <a:ea typeface="Courier New" pitchFamily="34" charset="-122"/>
-                <a:cs typeface="Courier New" pitchFamily="34" charset="-120"/>
-              </a:rPr>
-              <a:t>cuky</a:t>
+                  <a:srgbClr val="DCDCAA"/>
+                </a:solidFill>
+                <a:latin typeface="Courier New" pitchFamily="34" charset="0"/>
+                <a:ea typeface="Courier New" pitchFamily="34" charset="-122"/>
+                <a:cs typeface="Courier New" pitchFamily="34" charset="-120"/>
+              </a:rPr>
+              <a:t>curr</a:t>
+            </a:r>
+            <a:r>
+              <a:rPr lang="en-US" sz="950" dirty="0">
+                <a:solidFill>
+                  <a:srgbClr val="CCCCCC"/>
+                </a:solidFill>
+                <a:latin typeface="Courier New" pitchFamily="34" charset="0"/>
+                <a:ea typeface="Courier New" pitchFamily="34" charset="-122"/>
+                <a:cs typeface="Courier New" pitchFamily="34" charset="-120"/>
+              </a:rPr>
+              <a:t>(</a:t>
+            </a:r>
+            <a:r>
+              <a:rPr lang="en-US" sz="950" dirty="0">
+                <a:solidFill>
+                  <a:srgbClr val="B5CEA8"/>
+                </a:solidFill>
+                <a:latin typeface="Courier New" pitchFamily="34" charset="0"/>
+                <a:ea typeface="Courier New" pitchFamily="34" charset="-122"/>
+                <a:cs typeface="Courier New" pitchFamily="34" charset="-120"/>
+              </a:rPr>
+              <a:t>15</a:t>
+            </a:r>
+            <a:r>
+              <a:rPr lang="en-US" sz="950" dirty="0">
+                <a:solidFill>
+                  <a:srgbClr val="CCCCCC"/>
+                </a:solidFill>
+                <a:latin typeface="Courier New" pitchFamily="34" charset="0"/>
+                <a:ea typeface="Courier New" pitchFamily="34" charset="-122"/>
+                <a:cs typeface="Courier New" pitchFamily="34" charset="-120"/>
+              </a:rPr>
+              <a:t>,</a:t>
+            </a:r>
+            <a:r>
+              <a:rPr lang="en-US" sz="950" dirty="0">
+                <a:solidFill>
+                  <a:srgbClr val="B5CEA8"/>
+                </a:solidFill>
+                <a:latin typeface="Courier New" pitchFamily="34" charset="0"/>
+                <a:ea typeface="Courier New" pitchFamily="34" charset="-122"/>
+                <a:cs typeface="Courier New" pitchFamily="34" charset="-120"/>
+              </a:rPr>
+              <a:t>2</a:t>
+            </a:r>
+            <a:r>
+              <a:rPr lang="en-US" sz="950" dirty="0">
+                <a:solidFill>
+                  <a:srgbClr val="CCCCCC"/>
+                </a:solidFill>
+                <a:latin typeface="Courier New" pitchFamily="34" charset="0"/>
+                <a:ea typeface="Courier New" pitchFamily="34" charset="-122"/>
+                <a:cs typeface="Courier New" pitchFamily="34" charset="-120"/>
+              </a:rPr>
+              <a:t>)</a:t>
             </a:r>
             <a:r>
               <a:rPr lang="en-US" sz="950" dirty="0">
@@ -11818,13 +12025,13 @@
             <a:r>
               <a:rPr lang="en-US" sz="950" dirty="0">
                 <a:solidFill>
-                  <a:srgbClr val="569CD6"/>
-                </a:solidFill>
-                <a:latin typeface="Courier New" pitchFamily="34" charset="0"/>
-                <a:ea typeface="Courier New" pitchFamily="34" charset="-122"/>
-                <a:cs typeface="Courier New" pitchFamily="34" charset="-120"/>
-              </a:rPr>
-              <a:t>include</a:t>
+                  <a:srgbClr val="CCCCCC"/>
+                </a:solidFill>
+                <a:latin typeface="Courier New" pitchFamily="34" charset="0"/>
+                <a:ea typeface="Courier New" pitchFamily="34" charset="-122"/>
+                <a:cs typeface="Courier New" pitchFamily="34" charset="-120"/>
+              </a:rPr>
+              <a:t>created_by</a:t>
             </a:r>
             <a:r>
               <a:rPr lang="en-US" sz="950" dirty="0">
@@ -11835,6 +12042,28 @@
                 <a:ea typeface="Courier New" pitchFamily="34" charset="-122"/>
                 <a:cs typeface="Courier New" pitchFamily="34" charset="-120"/>
               </a:rPr>
+              <a:t>      </a:t>
+            </a:r>
+            <a:r>
+              <a:rPr lang="en-US" sz="950" dirty="0">
+                <a:solidFill>
+                  <a:srgbClr val="CCCCCC"/>
+                </a:solidFill>
+                <a:latin typeface="Courier New" pitchFamily="34" charset="0"/>
+                <a:ea typeface="Courier New" pitchFamily="34" charset="-122"/>
+                <a:cs typeface="Courier New" pitchFamily="34" charset="-120"/>
+              </a:rPr>
+              <a:t>:</a:t>
+            </a:r>
+            <a:r>
+              <a:rPr lang="en-US" sz="950" dirty="0">
+                <a:solidFill>
+                  <a:srgbClr val="CCCCCC"/>
+                </a:solidFill>
+                <a:latin typeface="Courier New" pitchFamily="34" charset="0"/>
+                <a:ea typeface="Courier New" pitchFamily="34" charset="-122"/>
+                <a:cs typeface="Courier New" pitchFamily="34" charset="-120"/>
+              </a:rPr>
               <a:t> </a:t>
             </a:r>
             <a:r>
@@ -11846,7 +12075,93 @@
                 <a:ea typeface="Courier New" pitchFamily="34" charset="-122"/>
                 <a:cs typeface="Courier New" pitchFamily="34" charset="-120"/>
               </a:rPr>
-              <a:t>zs4d430_admin_fields</a:t>
+              <a:t>abp_creation_user</a:t>
+            </a:r>
+            <a:r>
+              <a:rPr lang="en-US" sz="950" dirty="0">
+                <a:solidFill>
+                  <a:srgbClr val="CCCCCC"/>
+                </a:solidFill>
+                <a:latin typeface="Courier New" pitchFamily="34" charset="0"/>
+                <a:ea typeface="Courier New" pitchFamily="34" charset="-122"/>
+                <a:cs typeface="Courier New" pitchFamily="34" charset="-120"/>
+              </a:rPr>
+              <a:t>;</a:t>
+            </a:r>
+            <a:endParaRPr lang="en-US" sz="950" dirty="0"/>
+          </a:p>
+          <a:p>
+            <a:pPr indent="0" marL="0">
+              <a:lnSpc>
+                <a:spcPct val="105000"/>
+              </a:lnSpc>
+              <a:buNone/>
+            </a:pPr>
+            <a:r>
+              <a:rPr lang="en-US" sz="950" dirty="0">
+                <a:solidFill>
+                  <a:srgbClr val="CCCCCC"/>
+                </a:solidFill>
+                <a:latin typeface="Courier New" pitchFamily="34" charset="0"/>
+                <a:ea typeface="Courier New" pitchFamily="34" charset="-122"/>
+                <a:cs typeface="Courier New" pitchFamily="34" charset="-120"/>
+              </a:rPr>
+              <a:t>  </a:t>
+            </a:r>
+            <a:r>
+              <a:rPr lang="en-US" sz="950" dirty="0">
+                <a:solidFill>
+                  <a:srgbClr val="CCCCCC"/>
+                </a:solidFill>
+                <a:latin typeface="Courier New" pitchFamily="34" charset="0"/>
+                <a:ea typeface="Courier New" pitchFamily="34" charset="-122"/>
+                <a:cs typeface="Courier New" pitchFamily="34" charset="-120"/>
+              </a:rPr>
+              <a:t>last_changed_at</a:t>
+            </a:r>
+            <a:r>
+              <a:rPr lang="en-US" sz="950" dirty="0">
+                <a:solidFill>
+                  <a:srgbClr val="CCCCCC"/>
+                </a:solidFill>
+                <a:latin typeface="Courier New" pitchFamily="34" charset="0"/>
+                <a:ea typeface="Courier New" pitchFamily="34" charset="-122"/>
+                <a:cs typeface="Courier New" pitchFamily="34" charset="-120"/>
+              </a:rPr>
+              <a:t> </a:t>
+            </a:r>
+            <a:r>
+              <a:rPr lang="en-US" sz="950" dirty="0">
+                <a:solidFill>
+                  <a:srgbClr val="CCCCCC"/>
+                </a:solidFill>
+                <a:latin typeface="Courier New" pitchFamily="34" charset="0"/>
+                <a:ea typeface="Courier New" pitchFamily="34" charset="-122"/>
+                <a:cs typeface="Courier New" pitchFamily="34" charset="-120"/>
+              </a:rPr>
+              <a:t>:</a:t>
+            </a:r>
+            <a:r>
+              <a:rPr lang="en-US" sz="950" dirty="0">
+                <a:solidFill>
+                  <a:srgbClr val="CCCCCC"/>
+                </a:solidFill>
+                <a:latin typeface="Courier New" pitchFamily="34" charset="0"/>
+                <a:ea typeface="Courier New" pitchFamily="34" charset="-122"/>
+                <a:cs typeface="Courier New" pitchFamily="34" charset="-120"/>
+              </a:rPr>
+              <a:t> </a:t>
+            </a:r>
+            <a:r>
+              <a:rPr lang="en-US" sz="950" dirty="0">
+                <a:solidFill>
+                  <a:srgbClr val="CCCCCC"/>
+                </a:solidFill>
+                <a:latin typeface="Courier New" pitchFamily="34" charset="0"/>
+                <a:ea typeface="Courier New" pitchFamily="34" charset="-122"/>
+                <a:cs typeface="Courier New" pitchFamily="34" charset="-120"/>
+              </a:rPr>
+              <a:t>abp_lastchange_tstmpl</a:t>
             </a:r>
             <a:r>
               <a:rPr lang="en-US" sz="950" dirty="0">
@@ -12249,7 +12564,7 @@
                   <a:srgbClr val="1D2D3E"/>
                 </a:solidFill>
               </a:rPr>
-              <a:t>Data elements</a:t>
+              <a:t>Data elements x embutidos</a:t>
             </a:r>
             <a:endParaRPr lang="en-US" sz="1400" dirty="0"/>
           </a:p>
@@ -12260,10 +12575,59 @@
             <a:r>
               <a:rPr lang="en-US" sz="1050" dirty="0">
                 <a:solidFill>
+                  <a:srgbClr val="0064D9"/>
+                </a:solidFill>
+                <a:latin typeface="Courier New" pitchFamily="34" charset="0"/>
+                <a:ea typeface="Courier New" pitchFamily="34" charset="-122"/>
+                <a:cs typeface="Courier New" pitchFamily="34" charset="-120"/>
+              </a:rPr>
+              <a:t>sysuuid_x16</a:t>
+            </a:r>
+            <a:r>
+              <a:rPr lang="en-US" sz="1050" dirty="0">
+                <a:solidFill>
                   <a:srgbClr val="556B82"/>
                 </a:solidFill>
               </a:rPr>
-              <a:t>Ligam o campo a rótulos traduzíveis; tipos embutidos só para campos técnicos.</a:t>
+              <a:t> e </a:t>
+            </a:r>
+            <a:r>
+              <a:rPr lang="en-US" sz="1050" dirty="0">
+                <a:solidFill>
+                  <a:srgbClr val="0064D9"/>
+                </a:solidFill>
+                <a:latin typeface="Courier New" pitchFamily="34" charset="0"/>
+                <a:ea typeface="Courier New" pitchFamily="34" charset="-122"/>
+                <a:cs typeface="Courier New" pitchFamily="34" charset="-120"/>
+              </a:rPr>
+              <a:t>abp_*</a:t>
+            </a:r>
+            <a:r>
+              <a:rPr lang="en-US" sz="1050" dirty="0">
+                <a:solidFill>
+                  <a:srgbClr val="556B82"/>
+                </a:solidFill>
+              </a:rPr>
+              <a:t> trazem rótulos; o projeto usa tipos embutidos (</a:t>
+            </a:r>
+            <a:r>
+              <a:rPr lang="en-US" sz="1050" dirty="0">
+                <a:solidFill>
+                  <a:srgbClr val="0064D9"/>
+                </a:solidFill>
+                <a:latin typeface="Courier New" pitchFamily="34" charset="0"/>
+                <a:ea typeface="Courier New" pitchFamily="34" charset="-122"/>
+                <a:cs typeface="Courier New" pitchFamily="34" charset="-120"/>
+              </a:rPr>
+              <a:t>abap.char(10)</a:t>
+            </a:r>
+            <a:r>
+              <a:rPr lang="en-US" sz="1050" dirty="0">
+                <a:solidFill>
+                  <a:srgbClr val="556B82"/>
+                </a:solidFill>
+              </a:rPr>
+              <a:t>) nos campos de negócio.</a:t>
             </a:r>
             <a:endParaRPr lang="en-US" sz="1400" dirty="0"/>
           </a:p>
@@ -12355,27 +12719,62 @@
             <a:r>
               <a:rPr lang="en-US" sz="1250" b="1" dirty="0">
                 <a:solidFill>
+                  <a:srgbClr val="1D2D3E"/>
+                </a:solidFill>
+              </a:rPr>
+              <a:t>Campos administrativos</a:t>
+            </a:r>
+            <a:endParaRPr lang="en-US" sz="1400" dirty="0"/>
+          </a:p>
+          <a:p>
+            <a:pPr indent="0" marL="0">
+              <a:buNone/>
+            </a:pPr>
+            <a:r>
+              <a:rPr lang="en-US" sz="1050" dirty="0">
+                <a:solidFill>
+                  <a:srgbClr val="556B82"/>
+                </a:solidFill>
+              </a:rPr>
+              <a:t>Os tipos </a:t>
+            </a:r>
+            <a:r>
+              <a:rPr lang="en-US" sz="1050" dirty="0">
+                <a:solidFill>
                   <a:srgbClr val="0064D9"/>
                 </a:solidFill>
                 <a:latin typeface="Courier New" pitchFamily="34" charset="0"/>
                 <a:ea typeface="Courier New" pitchFamily="34" charset="-122"/>
                 <a:cs typeface="Courier New" pitchFamily="34" charset="-120"/>
               </a:rPr>
+              <a:t>abp_*</a:t>
+            </a:r>
+            <a:r>
+              <a:rPr lang="en-US" sz="1050" dirty="0">
+                <a:solidFill>
+                  <a:srgbClr val="556B82"/>
+                </a:solidFill>
+              </a:rPr>
+              <a:t> dizem ao RAP quem e quando criou ou alterou; uma </a:t>
+            </a:r>
+            <a:r>
+              <a:rPr lang="en-US" sz="1050" dirty="0">
+                <a:solidFill>
+                  <a:srgbClr val="0064D9"/>
+                </a:solidFill>
+                <a:latin typeface="Courier New" pitchFamily="34" charset="0"/>
+                <a:ea typeface="Courier New" pitchFamily="34" charset="-122"/>
+                <a:cs typeface="Courier New" pitchFamily="34" charset="-120"/>
+              </a:rPr>
               <a:t>include</a:t>
             </a:r>
-            <a:endParaRPr lang="en-US" sz="1400" dirty="0"/>
-          </a:p>
-          <a:p>
-            <a:pPr indent="0" marL="0">
-              <a:buNone/>
-            </a:pPr>
             <a:r>
               <a:rPr lang="en-US" sz="1050" dirty="0">
                 <a:solidFill>
                   <a:srgbClr val="556B82"/>
                 </a:solidFill>
               </a:rPr>
-              <a:t>Insere os campos de uma estrutura, como os administrativos do RAP.</a:t>
+              <a:t> também poderia trazê-los.</a:t>
             </a:r>
             <a:endParaRPr lang="en-US" sz="1400" dirty="0"/>
           </a:p>
@@ -13129,7 +13528,7 @@
         </p:blipFill>
         <p:spPr>
           <a:xfrm>
-            <a:off x="850392" y="1947672"/>
+            <a:off x="6511900" y="1947672"/>
             <a:ext cx="256032" cy="256032"/>
           </a:xfrm>
           <a:prstGeom prst="rect">
@@ -13153,7 +13552,7 @@
         </p:blipFill>
         <p:spPr>
           <a:xfrm>
-            <a:off x="6511900" y="1947672"/>
+            <a:off x="850392" y="1947672"/>
             <a:ext cx="256032" cy="256032"/>
           </a:xfrm>
           <a:prstGeom prst="rect">
@@ -13177,7 +13576,7 @@
         </p:blipFill>
         <p:spPr>
           <a:xfrm>
-            <a:off x="850392" y="3959352"/>
+            <a:off x="6511900" y="3959352"/>
             <a:ext cx="256032" cy="256032"/>
           </a:xfrm>
           <a:prstGeom prst="rect">
@@ -13201,8 +13600,8 @@
         </p:blipFill>
         <p:spPr>
           <a:xfrm>
-            <a:off x="6511900" y="3959352"/>
-            <a:ext cx="256032" cy="256032"/>
+            <a:off x="749808" y="5751576"/>
+            <a:ext cx="310896" cy="310896"/>
           </a:xfrm>
           <a:prstGeom prst="rect">
             <a:avLst/>
@@ -13225,8 +13624,8 @@
         </p:blipFill>
         <p:spPr>
           <a:xfrm>
-            <a:off x="749808" y="5751576"/>
-            <a:ext cx="310896" cy="310896"/>
+            <a:off x="850392" y="3959352"/>
+            <a:ext cx="256032" cy="256032"/>
           </a:xfrm>
           <a:prstGeom prst="rect">
             <a:avLst/>
@@ -13355,7 +13754,7 @@
                   <a:srgbClr val="89D1FF"/>
                 </a:solidFill>
               </a:rPr>
-              <a:t>AULA 02.02 · SEÇÃO 2</a:t>
+              <a:t>AULA 03.02 · SEÇÃO 2</a:t>
             </a:r>
             <a:endParaRPr lang="en-US" sz="1300" dirty="0"/>
           </a:p>
@@ -15221,7 +15620,7 @@
         <p:spPr>
           <a:xfrm>
             <a:off x="640080" y="1700784"/>
-            <a:ext cx="2231136" cy="292608"/>
+            <a:ext cx="1997964" cy="292608"/>
           </a:xfrm>
           <a:prstGeom prst="rect">
             <a:avLst/>
@@ -15241,7 +15640,7 @@
         <p:spPr>
           <a:xfrm>
             <a:off x="640080" y="1700784"/>
-            <a:ext cx="2231136" cy="27432"/>
+            <a:ext cx="1997964" cy="27432"/>
           </a:xfrm>
           <a:prstGeom prst="rect">
             <a:avLst/>
@@ -15261,7 +15660,7 @@
         <p:spPr>
           <a:xfrm>
             <a:off x="731520" y="1719072"/>
-            <a:ext cx="2048256" cy="274320"/>
+            <a:ext cx="1815084" cy="274320"/>
           </a:xfrm>
           <a:prstGeom prst="rect">
             <a:avLst/>
@@ -15282,7 +15681,7 @@
                   <a:srgbClr val="FFFFFF"/>
                 </a:solidFill>
               </a:rPr>
-              <a:t>zs4d430_flight.tabl.abap</a:t>
+              <a:t>zta_pc_item.tabl.abap</a:t>
             </a:r>
             <a:endParaRPr lang="en-US" sz="950" dirty="0"/>
           </a:p>
@@ -15318,7 +15717,7 @@
                   <a:srgbClr val="9DA5B4"/>
                 </a:solidFill>
               </a:rPr>
-              <a:t>ZS4D430_## › Dictionary › Database Tables (trecho)</a:t>
+              <a:t>ZAVBS_PC_ESTOQUE › ZTA_PC_ITEM (trecho, com peso hipotético)</a:t>
             </a:r>
             <a:endParaRPr lang="en-US" sz="850" dirty="0"/>
           </a:p>
@@ -15564,26 +15963,6 @@
             </a:r>
             <a:endParaRPr lang="en-US" sz="1050" dirty="0"/>
           </a:p>
-          <a:p>
-            <a:pPr algn="r" indent="0" marL="0">
-              <a:lnSpc>
-                <a:spcPct val="105000"/>
-              </a:lnSpc>
-              <a:buNone/>
-            </a:pPr>
-            <a:r>
-              <a:rPr lang="en-US" sz="1050" dirty="0">
-                <a:solidFill>
-                  <a:srgbClr val="6E7681"/>
-                </a:solidFill>
-                <a:latin typeface="Courier New" pitchFamily="34" charset="0"/>
-                <a:ea typeface="Courier New" pitchFamily="34" charset="-122"/>
-                <a:cs typeface="Courier New" pitchFamily="34" charset="-120"/>
-              </a:rPr>
-              <a:t>12</a:t>
-            </a:r>
-            <a:endParaRPr lang="en-US" sz="1050" dirty="0"/>
-          </a:p>
         </p:txBody>
       </p:sp>
       <p:sp>
@@ -15666,7 +16045,7 @@
                 <a:ea typeface="Courier New" pitchFamily="34" charset="-122"/>
                 <a:cs typeface="Courier New" pitchFamily="34" charset="-120"/>
               </a:rPr>
-              <a:t>zs4d430_flight</a:t>
+              <a:t>zta_pc_item</a:t>
             </a:r>
             <a:r>
               <a:rPr lang="en-US" sz="1050" dirty="0">
@@ -15752,7 +16131,7 @@
                 <a:ea typeface="Courier New" pitchFamily="34" charset="-122"/>
                 <a:cs typeface="Courier New" pitchFamily="34" charset="-120"/>
               </a:rPr>
-              <a:t>        </a:t>
+              <a:t>     </a:t>
             </a:r>
             <a:r>
               <a:rPr lang="en-US" sz="1050" dirty="0">
@@ -15915,7 +16294,7 @@
                 <a:ea typeface="Courier New" pitchFamily="34" charset="-122"/>
                 <a:cs typeface="Courier New" pitchFamily="34" charset="-120"/>
               </a:rPr>
-              <a:t>carrier_id</a:t>
+              <a:t>item_uuid</a:t>
             </a:r>
             <a:r>
               <a:rPr lang="en-US" sz="1050" dirty="0">
@@ -15926,7 +16305,7 @@
                 <a:ea typeface="Courier New" pitchFamily="34" charset="-122"/>
                 <a:cs typeface="Courier New" pitchFamily="34" charset="-120"/>
               </a:rPr>
-              <a:t>    </a:t>
+              <a:t>  </a:t>
             </a:r>
             <a:r>
               <a:rPr lang="en-US" sz="1050" dirty="0">
@@ -15959,7 +16338,7 @@
                 <a:ea typeface="Courier New" pitchFamily="34" charset="-122"/>
                 <a:cs typeface="Courier New" pitchFamily="34" charset="-120"/>
               </a:rPr>
-              <a:t>/dmo/carrier_id</a:t>
+              <a:t>sysuuid_x16</a:t>
             </a:r>
             <a:r>
               <a:rPr lang="en-US" sz="1050" dirty="0">
@@ -16039,13 +16418,13 @@
             <a:r>
               <a:rPr lang="en-US" sz="1050" dirty="0">
                 <a:solidFill>
-                  <a:srgbClr val="569CD6"/>
-                </a:solidFill>
-                <a:latin typeface="Courier New" pitchFamily="34" charset="0"/>
-                <a:ea typeface="Courier New" pitchFamily="34" charset="-122"/>
-                <a:cs typeface="Courier New" pitchFamily="34" charset="-120"/>
-              </a:rPr>
-              <a:t>key</a:t>
+                  <a:srgbClr val="CCCCCC"/>
+                </a:solidFill>
+                <a:latin typeface="Courier New" pitchFamily="34" charset="0"/>
+                <a:ea typeface="Courier New" pitchFamily="34" charset="-122"/>
+                <a:cs typeface="Courier New" pitchFamily="34" charset="-120"/>
+              </a:rPr>
+              <a:t>currency</a:t>
             </a:r>
             <a:r>
               <a:rPr lang="en-US" sz="1050" dirty="0">
@@ -16056,6 +16435,28 @@
                 <a:ea typeface="Courier New" pitchFamily="34" charset="-122"/>
                 <a:cs typeface="Courier New" pitchFamily="34" charset="-120"/>
               </a:rPr>
+              <a:t>       </a:t>
+            </a:r>
+            <a:r>
+              <a:rPr lang="en-US" sz="1050" dirty="0">
+                <a:solidFill>
+                  <a:srgbClr val="CCCCCC"/>
+                </a:solidFill>
+                <a:latin typeface="Courier New" pitchFamily="34" charset="0"/>
+                <a:ea typeface="Courier New" pitchFamily="34" charset="-122"/>
+                <a:cs typeface="Courier New" pitchFamily="34" charset="-120"/>
+              </a:rPr>
+              <a:t>:</a:t>
+            </a:r>
+            <a:r>
+              <a:rPr lang="en-US" sz="1050" dirty="0">
+                <a:solidFill>
+                  <a:srgbClr val="CCCCCC"/>
+                </a:solidFill>
+                <a:latin typeface="Courier New" pitchFamily="34" charset="0"/>
+                <a:ea typeface="Courier New" pitchFamily="34" charset="-122"/>
+                <a:cs typeface="Courier New" pitchFamily="34" charset="-120"/>
+              </a:rPr>
               <a:t> </a:t>
             </a:r>
             <a:r>
@@ -16067,7 +16468,7 @@
                 <a:ea typeface="Courier New" pitchFamily="34" charset="-122"/>
                 <a:cs typeface="Courier New" pitchFamily="34" charset="-120"/>
               </a:rPr>
-              <a:t>connection_id</a:t>
+              <a:t>abap</a:t>
             </a:r>
             <a:r>
               <a:rPr lang="en-US" sz="1050" dirty="0">
@@ -16078,7 +16479,7 @@
                 <a:ea typeface="Courier New" pitchFamily="34" charset="-122"/>
                 <a:cs typeface="Courier New" pitchFamily="34" charset="-120"/>
               </a:rPr>
-              <a:t> </a:t>
+              <a:t>.</a:t>
             </a:r>
             <a:r>
               <a:rPr lang="en-US" sz="1050" dirty="0">
@@ -16089,73 +16490,7 @@
                 <a:ea typeface="Courier New" pitchFamily="34" charset="-122"/>
                 <a:cs typeface="Courier New" pitchFamily="34" charset="-120"/>
               </a:rPr>
-              <a:t>:</a:t>
-            </a:r>
-            <a:r>
-              <a:rPr lang="en-US" sz="1050" dirty="0">
-                <a:solidFill>
-                  <a:srgbClr val="CCCCCC"/>
-                </a:solidFill>
-                <a:latin typeface="Courier New" pitchFamily="34" charset="0"/>
-                <a:ea typeface="Courier New" pitchFamily="34" charset="-122"/>
-                <a:cs typeface="Courier New" pitchFamily="34" charset="-120"/>
-              </a:rPr>
-              <a:t> </a:t>
-            </a:r>
-            <a:r>
-              <a:rPr lang="en-US" sz="1050" dirty="0">
-                <a:solidFill>
-                  <a:srgbClr val="CCCCCC"/>
-                </a:solidFill>
-                <a:latin typeface="Courier New" pitchFamily="34" charset="0"/>
-                <a:ea typeface="Courier New" pitchFamily="34" charset="-122"/>
-                <a:cs typeface="Courier New" pitchFamily="34" charset="-120"/>
-              </a:rPr>
-              <a:t>/dmo/connection_id</a:t>
-            </a:r>
-            <a:r>
-              <a:rPr lang="en-US" sz="1050" dirty="0">
-                <a:solidFill>
-                  <a:srgbClr val="CCCCCC"/>
-                </a:solidFill>
-                <a:latin typeface="Courier New" pitchFamily="34" charset="0"/>
-                <a:ea typeface="Courier New" pitchFamily="34" charset="-122"/>
-                <a:cs typeface="Courier New" pitchFamily="34" charset="-120"/>
-              </a:rPr>
-              <a:t> </a:t>
-            </a:r>
-            <a:r>
-              <a:rPr lang="en-US" sz="1050" dirty="0">
-                <a:solidFill>
-                  <a:srgbClr val="569CD6"/>
-                </a:solidFill>
-                <a:latin typeface="Courier New" pitchFamily="34" charset="0"/>
-                <a:ea typeface="Courier New" pitchFamily="34" charset="-122"/>
-                <a:cs typeface="Courier New" pitchFamily="34" charset="-120"/>
-              </a:rPr>
-              <a:t>not</a:t>
-            </a:r>
-            <a:r>
-              <a:rPr lang="en-US" sz="1050" dirty="0">
-                <a:solidFill>
-                  <a:srgbClr val="CCCCCC"/>
-                </a:solidFill>
-                <a:latin typeface="Courier New" pitchFamily="34" charset="0"/>
-                <a:ea typeface="Courier New" pitchFamily="34" charset="-122"/>
-                <a:cs typeface="Courier New" pitchFamily="34" charset="-120"/>
-              </a:rPr>
-              <a:t> </a:t>
-            </a:r>
-            <a:r>
-              <a:rPr lang="en-US" sz="1050" dirty="0">
-                <a:solidFill>
-                  <a:srgbClr val="569CD6"/>
-                </a:solidFill>
-                <a:latin typeface="Courier New" pitchFamily="34" charset="0"/>
-                <a:ea typeface="Courier New" pitchFamily="34" charset="-122"/>
-                <a:cs typeface="Courier New" pitchFamily="34" charset="-120"/>
-              </a:rPr>
-              <a:t>null</a:t>
+              <a:t>cuky</a:t>
             </a:r>
             <a:r>
               <a:rPr lang="en-US" sz="1050" dirty="0">
@@ -16191,13 +16526,13 @@
             <a:r>
               <a:rPr lang="en-US" sz="1050" dirty="0">
                 <a:solidFill>
-                  <a:srgbClr val="569CD6"/>
-                </a:solidFill>
-                <a:latin typeface="Courier New" pitchFamily="34" charset="0"/>
-                <a:ea typeface="Courier New" pitchFamily="34" charset="-122"/>
-                <a:cs typeface="Courier New" pitchFamily="34" charset="-120"/>
-              </a:rPr>
-              <a:t>key</a:t>
+                  <a:srgbClr val="4EC9B0"/>
+                </a:solidFill>
+                <a:latin typeface="Courier New" pitchFamily="34" charset="0"/>
+                <a:ea typeface="Courier New" pitchFamily="34" charset="-122"/>
+                <a:cs typeface="Courier New" pitchFamily="34" charset="-120"/>
+              </a:rPr>
+              <a:t>@Semantics.amount.currencyCode</a:t>
             </a:r>
             <a:r>
               <a:rPr lang="en-US" sz="1050" dirty="0">
@@ -16219,7 +16554,7 @@
                 <a:ea typeface="Courier New" pitchFamily="34" charset="-122"/>
                 <a:cs typeface="Courier New" pitchFamily="34" charset="-120"/>
               </a:rPr>
-              <a:t>flight_date</a:t>
+              <a:t>:</a:t>
             </a:r>
             <a:r>
               <a:rPr lang="en-US" sz="1050" dirty="0">
@@ -16230,95 +16565,18 @@
                 <a:ea typeface="Courier New" pitchFamily="34" charset="-122"/>
                 <a:cs typeface="Courier New" pitchFamily="34" charset="-120"/>
               </a:rPr>
-              <a:t>   </a:t>
+              <a:t> </a:t>
             </a:r>
             <a:r>
               <a:rPr lang="en-US" sz="1050" dirty="0">
                 <a:solidFill>
-                  <a:srgbClr val="CCCCCC"/>
-                </a:solidFill>
-                <a:latin typeface="Courier New" pitchFamily="34" charset="0"/>
-                <a:ea typeface="Courier New" pitchFamily="34" charset="-122"/>
-                <a:cs typeface="Courier New" pitchFamily="34" charset="-120"/>
-              </a:rPr>
-              <a:t>:</a:t>
-            </a:r>
-            <a:r>
-              <a:rPr lang="en-US" sz="1050" dirty="0">
-                <a:solidFill>
-                  <a:srgbClr val="CCCCCC"/>
-                </a:solidFill>
-                <a:latin typeface="Courier New" pitchFamily="34" charset="0"/>
-                <a:ea typeface="Courier New" pitchFamily="34" charset="-122"/>
-                <a:cs typeface="Courier New" pitchFamily="34" charset="-120"/>
-              </a:rPr>
-              <a:t> </a:t>
-            </a:r>
-            <a:r>
-              <a:rPr lang="en-US" sz="1050" dirty="0">
-                <a:solidFill>
-                  <a:srgbClr val="CCCCCC"/>
-                </a:solidFill>
-                <a:latin typeface="Courier New" pitchFamily="34" charset="0"/>
-                <a:ea typeface="Courier New" pitchFamily="34" charset="-122"/>
-                <a:cs typeface="Courier New" pitchFamily="34" charset="-120"/>
-              </a:rPr>
-              <a:t>/dmo/flight_date</a:t>
-            </a:r>
-            <a:r>
-              <a:rPr lang="en-US" sz="1050" dirty="0">
-                <a:solidFill>
-                  <a:srgbClr val="CCCCCC"/>
-                </a:solidFill>
-                <a:latin typeface="Courier New" pitchFamily="34" charset="0"/>
-                <a:ea typeface="Courier New" pitchFamily="34" charset="-122"/>
-                <a:cs typeface="Courier New" pitchFamily="34" charset="-120"/>
-              </a:rPr>
-              <a:t> </a:t>
-            </a:r>
-            <a:r>
-              <a:rPr lang="en-US" sz="1050" dirty="0">
-                <a:solidFill>
-                  <a:srgbClr val="569CD6"/>
-                </a:solidFill>
-                <a:latin typeface="Courier New" pitchFamily="34" charset="0"/>
-                <a:ea typeface="Courier New" pitchFamily="34" charset="-122"/>
-                <a:cs typeface="Courier New" pitchFamily="34" charset="-120"/>
-              </a:rPr>
-              <a:t>not</a:t>
-            </a:r>
-            <a:r>
-              <a:rPr lang="en-US" sz="1050" dirty="0">
-                <a:solidFill>
-                  <a:srgbClr val="CCCCCC"/>
-                </a:solidFill>
-                <a:latin typeface="Courier New" pitchFamily="34" charset="0"/>
-                <a:ea typeface="Courier New" pitchFamily="34" charset="-122"/>
-                <a:cs typeface="Courier New" pitchFamily="34" charset="-120"/>
-              </a:rPr>
-              <a:t> </a:t>
-            </a:r>
-            <a:r>
-              <a:rPr lang="en-US" sz="1050" dirty="0">
-                <a:solidFill>
-                  <a:srgbClr val="569CD6"/>
-                </a:solidFill>
-                <a:latin typeface="Courier New" pitchFamily="34" charset="0"/>
-                <a:ea typeface="Courier New" pitchFamily="34" charset="-122"/>
-                <a:cs typeface="Courier New" pitchFamily="34" charset="-120"/>
-              </a:rPr>
-              <a:t>null</a:t>
-            </a:r>
-            <a:r>
-              <a:rPr lang="en-US" sz="1050" dirty="0">
-                <a:solidFill>
-                  <a:srgbClr val="CCCCCC"/>
-                </a:solidFill>
-                <a:latin typeface="Courier New" pitchFamily="34" charset="0"/>
-                <a:ea typeface="Courier New" pitchFamily="34" charset="-122"/>
-                <a:cs typeface="Courier New" pitchFamily="34" charset="-120"/>
-              </a:rPr>
-              <a:t>;</a:t>
+                  <a:srgbClr val="CE9178"/>
+                </a:solidFill>
+                <a:latin typeface="Courier New" pitchFamily="34" charset="0"/>
+                <a:ea typeface="Courier New" pitchFamily="34" charset="-122"/>
+                <a:cs typeface="Courier New" pitchFamily="34" charset="-120"/>
+              </a:rPr>
+              <a:t>'zta_pc_item.currency'</a:t>
             </a:r>
             <a:endParaRPr lang="en-US" sz="1050" dirty="0"/>
           </a:p>
@@ -16343,13 +16601,13 @@
             <a:r>
               <a:rPr lang="en-US" sz="1050" dirty="0">
                 <a:solidFill>
-                  <a:srgbClr val="4EC9B0"/>
-                </a:solidFill>
-                <a:latin typeface="Courier New" pitchFamily="34" charset="0"/>
-                <a:ea typeface="Courier New" pitchFamily="34" charset="-122"/>
-                <a:cs typeface="Courier New" pitchFamily="34" charset="-120"/>
-              </a:rPr>
-              <a:t>@Semantics.amount.currencyCode</a:t>
+                  <a:srgbClr val="CCCCCC"/>
+                </a:solidFill>
+                <a:latin typeface="Courier New" pitchFamily="34" charset="0"/>
+                <a:ea typeface="Courier New" pitchFamily="34" charset="-122"/>
+                <a:cs typeface="Courier New" pitchFamily="34" charset="-120"/>
+              </a:rPr>
+              <a:t>preco_unitario</a:t>
             </a:r>
             <a:r>
               <a:rPr lang="en-US" sz="1050" dirty="0">
@@ -16387,13 +16645,101 @@
             <a:r>
               <a:rPr lang="en-US" sz="1050" dirty="0">
                 <a:solidFill>
-                  <a:srgbClr val="CE9178"/>
-                </a:solidFill>
-                <a:latin typeface="Courier New" pitchFamily="34" charset="0"/>
-                <a:ea typeface="Courier New" pitchFamily="34" charset="-122"/>
-                <a:cs typeface="Courier New" pitchFamily="34" charset="-120"/>
-              </a:rPr>
-              <a:t>'zs4d430_flight.currency_code'</a:t>
+                  <a:srgbClr val="CCCCCC"/>
+                </a:solidFill>
+                <a:latin typeface="Courier New" pitchFamily="34" charset="0"/>
+                <a:ea typeface="Courier New" pitchFamily="34" charset="-122"/>
+                <a:cs typeface="Courier New" pitchFamily="34" charset="-120"/>
+              </a:rPr>
+              <a:t>abap</a:t>
+            </a:r>
+            <a:r>
+              <a:rPr lang="en-US" sz="1050" dirty="0">
+                <a:solidFill>
+                  <a:srgbClr val="CCCCCC"/>
+                </a:solidFill>
+                <a:latin typeface="Courier New" pitchFamily="34" charset="0"/>
+                <a:ea typeface="Courier New" pitchFamily="34" charset="-122"/>
+                <a:cs typeface="Courier New" pitchFamily="34" charset="-120"/>
+              </a:rPr>
+              <a:t>.</a:t>
+            </a:r>
+            <a:r>
+              <a:rPr lang="en-US" sz="1050" dirty="0">
+                <a:solidFill>
+                  <a:srgbClr val="DCDCAA"/>
+                </a:solidFill>
+                <a:latin typeface="Courier New" pitchFamily="34" charset="0"/>
+                <a:ea typeface="Courier New" pitchFamily="34" charset="-122"/>
+                <a:cs typeface="Courier New" pitchFamily="34" charset="-120"/>
+              </a:rPr>
+              <a:t>curr</a:t>
+            </a:r>
+            <a:r>
+              <a:rPr lang="en-US" sz="1050" dirty="0">
+                <a:solidFill>
+                  <a:srgbClr val="CCCCCC"/>
+                </a:solidFill>
+                <a:latin typeface="Courier New" pitchFamily="34" charset="0"/>
+                <a:ea typeface="Courier New" pitchFamily="34" charset="-122"/>
+                <a:cs typeface="Courier New" pitchFamily="34" charset="-120"/>
+              </a:rPr>
+              <a:t>(</a:t>
+            </a:r>
+            <a:r>
+              <a:rPr lang="en-US" sz="1050" dirty="0">
+                <a:solidFill>
+                  <a:srgbClr val="B5CEA8"/>
+                </a:solidFill>
+                <a:latin typeface="Courier New" pitchFamily="34" charset="0"/>
+                <a:ea typeface="Courier New" pitchFamily="34" charset="-122"/>
+                <a:cs typeface="Courier New" pitchFamily="34" charset="-120"/>
+              </a:rPr>
+              <a:t>15</a:t>
+            </a:r>
+            <a:r>
+              <a:rPr lang="en-US" sz="1050" dirty="0">
+                <a:solidFill>
+                  <a:srgbClr val="CCCCCC"/>
+                </a:solidFill>
+                <a:latin typeface="Courier New" pitchFamily="34" charset="0"/>
+                <a:ea typeface="Courier New" pitchFamily="34" charset="-122"/>
+                <a:cs typeface="Courier New" pitchFamily="34" charset="-120"/>
+              </a:rPr>
+              <a:t>,</a:t>
+            </a:r>
+            <a:r>
+              <a:rPr lang="en-US" sz="1050" dirty="0">
+                <a:solidFill>
+                  <a:srgbClr val="B5CEA8"/>
+                </a:solidFill>
+                <a:latin typeface="Courier New" pitchFamily="34" charset="0"/>
+                <a:ea typeface="Courier New" pitchFamily="34" charset="-122"/>
+                <a:cs typeface="Courier New" pitchFamily="34" charset="-120"/>
+              </a:rPr>
+              <a:t>2</a:t>
+            </a:r>
+            <a:r>
+              <a:rPr lang="en-US" sz="1050" dirty="0">
+                <a:solidFill>
+                  <a:srgbClr val="CCCCCC"/>
+                </a:solidFill>
+                <a:latin typeface="Courier New" pitchFamily="34" charset="0"/>
+                <a:ea typeface="Courier New" pitchFamily="34" charset="-122"/>
+                <a:cs typeface="Courier New" pitchFamily="34" charset="-120"/>
+              </a:rPr>
+              <a:t>)</a:t>
+            </a:r>
+            <a:r>
+              <a:rPr lang="en-US" sz="1050" dirty="0">
+                <a:solidFill>
+                  <a:srgbClr val="CCCCCC"/>
+                </a:solidFill>
+                <a:latin typeface="Courier New" pitchFamily="34" charset="0"/>
+                <a:ea typeface="Courier New" pitchFamily="34" charset="-122"/>
+                <a:cs typeface="Courier New" pitchFamily="34" charset="-120"/>
+              </a:rPr>
+              <a:t>;</a:t>
             </a:r>
             <a:endParaRPr lang="en-US" sz="1050" dirty="0"/>
           </a:p>
@@ -16405,81 +16751,15 @@
               <a:buNone/>
             </a:pPr>
             <a:r>
-              <a:rPr lang="en-US" sz="1050" dirty="0">
-                <a:solidFill>
-                  <a:srgbClr val="CCCCCC"/>
-                </a:solidFill>
-                <a:latin typeface="Courier New" pitchFamily="34" charset="0"/>
-                <a:ea typeface="Courier New" pitchFamily="34" charset="-122"/>
-                <a:cs typeface="Courier New" pitchFamily="34" charset="-120"/>
-              </a:rPr>
-              <a:t>  </a:t>
-            </a:r>
-            <a:r>
-              <a:rPr lang="en-US" sz="1050" dirty="0">
-                <a:solidFill>
-                  <a:srgbClr val="CCCCCC"/>
-                </a:solidFill>
-                <a:latin typeface="Courier New" pitchFamily="34" charset="0"/>
-                <a:ea typeface="Courier New" pitchFamily="34" charset="-122"/>
-                <a:cs typeface="Courier New" pitchFamily="34" charset="-120"/>
-              </a:rPr>
-              <a:t>price</a:t>
-            </a:r>
-            <a:r>
-              <a:rPr lang="en-US" sz="1050" dirty="0">
-                <a:solidFill>
-                  <a:srgbClr val="CCCCCC"/>
-                </a:solidFill>
-                <a:latin typeface="Courier New" pitchFamily="34" charset="0"/>
-                <a:ea typeface="Courier New" pitchFamily="34" charset="-122"/>
-                <a:cs typeface="Courier New" pitchFamily="34" charset="-120"/>
-              </a:rPr>
-              <a:t>             </a:t>
-            </a:r>
-            <a:r>
-              <a:rPr lang="en-US" sz="1050" dirty="0">
-                <a:solidFill>
-                  <a:srgbClr val="CCCCCC"/>
-                </a:solidFill>
-                <a:latin typeface="Courier New" pitchFamily="34" charset="0"/>
-                <a:ea typeface="Courier New" pitchFamily="34" charset="-122"/>
-                <a:cs typeface="Courier New" pitchFamily="34" charset="-120"/>
-              </a:rPr>
-              <a:t>:</a:t>
-            </a:r>
-            <a:r>
-              <a:rPr lang="en-US" sz="1050" dirty="0">
-                <a:solidFill>
-                  <a:srgbClr val="CCCCCC"/>
-                </a:solidFill>
-                <a:latin typeface="Courier New" pitchFamily="34" charset="0"/>
-                <a:ea typeface="Courier New" pitchFamily="34" charset="-122"/>
-                <a:cs typeface="Courier New" pitchFamily="34" charset="-120"/>
-              </a:rPr>
-              <a:t> </a:t>
-            </a:r>
-            <a:r>
-              <a:rPr lang="en-US" sz="1050" dirty="0">
-                <a:solidFill>
-                  <a:srgbClr val="CCCCCC"/>
-                </a:solidFill>
-                <a:latin typeface="Courier New" pitchFamily="34" charset="0"/>
-                <a:ea typeface="Courier New" pitchFamily="34" charset="-122"/>
-                <a:cs typeface="Courier New" pitchFamily="34" charset="-120"/>
-              </a:rPr>
-              <a:t>/dmo/flight_price</a:t>
-            </a:r>
-            <a:r>
-              <a:rPr lang="en-US" sz="1050" dirty="0">
-                <a:solidFill>
-                  <a:srgbClr val="CCCCCC"/>
-                </a:solidFill>
-                <a:latin typeface="Courier New" pitchFamily="34" charset="0"/>
-                <a:ea typeface="Courier New" pitchFamily="34" charset="-122"/>
-                <a:cs typeface="Courier New" pitchFamily="34" charset="-120"/>
-              </a:rPr>
-              <a:t>;</a:t>
+              <a:rPr lang="en-US" sz="1050" i="1" dirty="0">
+                <a:solidFill>
+                  <a:srgbClr val="6A9955"/>
+                </a:solidFill>
+                <a:latin typeface="Courier New" pitchFamily="34" charset="0"/>
+                <a:ea typeface="Courier New" pitchFamily="34" charset="-122"/>
+                <a:cs typeface="Courier New" pitchFamily="34" charset="-120"/>
+              </a:rPr>
+              <a:t>  // peso: campos hipotéticos, para calcular frete</a:t>
             </a:r>
             <a:endParaRPr lang="en-US" sz="1050" dirty="0"/>
           </a:p>
@@ -16504,13 +16784,13 @@
             <a:r>
               <a:rPr lang="en-US" sz="1050" dirty="0">
                 <a:solidFill>
-                  <a:srgbClr val="CCCCCC"/>
-                </a:solidFill>
-                <a:latin typeface="Courier New" pitchFamily="34" charset="0"/>
-                <a:ea typeface="Courier New" pitchFamily="34" charset="-122"/>
-                <a:cs typeface="Courier New" pitchFamily="34" charset="-120"/>
-              </a:rPr>
-              <a:t>currency_code</a:t>
+                  <a:srgbClr val="4EC9B0"/>
+                </a:solidFill>
+                <a:latin typeface="Courier New" pitchFamily="34" charset="0"/>
+                <a:ea typeface="Courier New" pitchFamily="34" charset="-122"/>
+                <a:cs typeface="Courier New" pitchFamily="34" charset="-120"/>
+              </a:rPr>
+              <a:t>@Semantics.quantity.unitOfMeasure</a:t>
             </a:r>
             <a:r>
               <a:rPr lang="en-US" sz="1050" dirty="0">
@@ -16521,7 +16801,7 @@
                 <a:ea typeface="Courier New" pitchFamily="34" charset="-122"/>
                 <a:cs typeface="Courier New" pitchFamily="34" charset="-120"/>
               </a:rPr>
-              <a:t>     </a:t>
+              <a:t> </a:t>
             </a:r>
             <a:r>
               <a:rPr lang="en-US" sz="1050" dirty="0">
@@ -16548,24 +16828,13 @@
             <a:r>
               <a:rPr lang="en-US" sz="1050" dirty="0">
                 <a:solidFill>
-                  <a:srgbClr val="CCCCCC"/>
-                </a:solidFill>
-                <a:latin typeface="Courier New" pitchFamily="34" charset="0"/>
-                <a:ea typeface="Courier New" pitchFamily="34" charset="-122"/>
-                <a:cs typeface="Courier New" pitchFamily="34" charset="-120"/>
-              </a:rPr>
-              <a:t>/dmo/currency_code</a:t>
-            </a:r>
-            <a:r>
-              <a:rPr lang="en-US" sz="1050" dirty="0">
-                <a:solidFill>
-                  <a:srgbClr val="CCCCCC"/>
-                </a:solidFill>
-                <a:latin typeface="Courier New" pitchFamily="34" charset="0"/>
-                <a:ea typeface="Courier New" pitchFamily="34" charset="-122"/>
-                <a:cs typeface="Courier New" pitchFamily="34" charset="-120"/>
-              </a:rPr>
-              <a:t>;</a:t>
+                  <a:srgbClr val="CE9178"/>
+                </a:solidFill>
+                <a:latin typeface="Courier New" pitchFamily="34" charset="0"/>
+                <a:ea typeface="Courier New" pitchFamily="34" charset="-122"/>
+                <a:cs typeface="Courier New" pitchFamily="34" charset="-120"/>
+              </a:rPr>
+              <a:t>'zta_pc_item.unidade_peso'</a:t>
             </a:r>
             <a:endParaRPr lang="en-US" sz="1050" dirty="0"/>
           </a:p>
@@ -16590,13 +16859,13 @@
             <a:r>
               <a:rPr lang="en-US" sz="1050" dirty="0">
                 <a:solidFill>
-                  <a:srgbClr val="4EC9B0"/>
-                </a:solidFill>
-                <a:latin typeface="Courier New" pitchFamily="34" charset="0"/>
-                <a:ea typeface="Courier New" pitchFamily="34" charset="-122"/>
-                <a:cs typeface="Courier New" pitchFamily="34" charset="-120"/>
-              </a:rPr>
-              <a:t>@Semantics.quantity.unitOfMeasure</a:t>
+                  <a:srgbClr val="CCCCCC"/>
+                </a:solidFill>
+                <a:latin typeface="Courier New" pitchFamily="34" charset="0"/>
+                <a:ea typeface="Courier New" pitchFamily="34" charset="-122"/>
+                <a:cs typeface="Courier New" pitchFamily="34" charset="-120"/>
+              </a:rPr>
+              <a:t>peso</a:t>
             </a:r>
             <a:r>
               <a:rPr lang="en-US" sz="1050" dirty="0">
@@ -16607,6 +16876,28 @@
                 <a:ea typeface="Courier New" pitchFamily="34" charset="-122"/>
                 <a:cs typeface="Courier New" pitchFamily="34" charset="-120"/>
               </a:rPr>
+              <a:t>           </a:t>
+            </a:r>
+            <a:r>
+              <a:rPr lang="en-US" sz="1050" dirty="0">
+                <a:solidFill>
+                  <a:srgbClr val="CCCCCC"/>
+                </a:solidFill>
+                <a:latin typeface="Courier New" pitchFamily="34" charset="0"/>
+                <a:ea typeface="Courier New" pitchFamily="34" charset="-122"/>
+                <a:cs typeface="Courier New" pitchFamily="34" charset="-120"/>
+              </a:rPr>
+              <a:t>:</a:t>
+            </a:r>
+            <a:r>
+              <a:rPr lang="en-US" sz="1050" dirty="0">
+                <a:solidFill>
+                  <a:srgbClr val="CCCCCC"/>
+                </a:solidFill>
+                <a:latin typeface="Courier New" pitchFamily="34" charset="0"/>
+                <a:ea typeface="Courier New" pitchFamily="34" charset="-122"/>
+                <a:cs typeface="Courier New" pitchFamily="34" charset="-120"/>
+              </a:rPr>
               <a:t> </a:t>
             </a:r>
             <a:r>
@@ -16618,7 +16909,7 @@
                 <a:ea typeface="Courier New" pitchFamily="34" charset="-122"/>
                 <a:cs typeface="Courier New" pitchFamily="34" charset="-120"/>
               </a:rPr>
-              <a:t>:</a:t>
+              <a:t>abap</a:t>
             </a:r>
             <a:r>
               <a:rPr lang="en-US" sz="1050" dirty="0">
@@ -16629,18 +16920,84 @@
                 <a:ea typeface="Courier New" pitchFamily="34" charset="-122"/>
                 <a:cs typeface="Courier New" pitchFamily="34" charset="-120"/>
               </a:rPr>
-              <a:t> </a:t>
+              <a:t>.</a:t>
             </a:r>
             <a:r>
               <a:rPr lang="en-US" sz="1050" dirty="0">
                 <a:solidFill>
-                  <a:srgbClr val="CE9178"/>
-                </a:solidFill>
-                <a:latin typeface="Courier New" pitchFamily="34" charset="0"/>
-                <a:ea typeface="Courier New" pitchFamily="34" charset="-122"/>
-                <a:cs typeface="Courier New" pitchFamily="34" charset="-120"/>
-              </a:rPr>
-              <a:t>'zs4d430_flight.weight_unit'</a:t>
+                  <a:srgbClr val="DCDCAA"/>
+                </a:solidFill>
+                <a:latin typeface="Courier New" pitchFamily="34" charset="0"/>
+                <a:ea typeface="Courier New" pitchFamily="34" charset="-122"/>
+                <a:cs typeface="Courier New" pitchFamily="34" charset="-120"/>
+              </a:rPr>
+              <a:t>quan</a:t>
+            </a:r>
+            <a:r>
+              <a:rPr lang="en-US" sz="1050" dirty="0">
+                <a:solidFill>
+                  <a:srgbClr val="CCCCCC"/>
+                </a:solidFill>
+                <a:latin typeface="Courier New" pitchFamily="34" charset="0"/>
+                <a:ea typeface="Courier New" pitchFamily="34" charset="-122"/>
+                <a:cs typeface="Courier New" pitchFamily="34" charset="-120"/>
+              </a:rPr>
+              <a:t>(</a:t>
+            </a:r>
+            <a:r>
+              <a:rPr lang="en-US" sz="1050" dirty="0">
+                <a:solidFill>
+                  <a:srgbClr val="B5CEA8"/>
+                </a:solidFill>
+                <a:latin typeface="Courier New" pitchFamily="34" charset="0"/>
+                <a:ea typeface="Courier New" pitchFamily="34" charset="-122"/>
+                <a:cs typeface="Courier New" pitchFamily="34" charset="-120"/>
+              </a:rPr>
+              <a:t>10</a:t>
+            </a:r>
+            <a:r>
+              <a:rPr lang="en-US" sz="1050" dirty="0">
+                <a:solidFill>
+                  <a:srgbClr val="CCCCCC"/>
+                </a:solidFill>
+                <a:latin typeface="Courier New" pitchFamily="34" charset="0"/>
+                <a:ea typeface="Courier New" pitchFamily="34" charset="-122"/>
+                <a:cs typeface="Courier New" pitchFamily="34" charset="-120"/>
+              </a:rPr>
+              <a:t>,</a:t>
+            </a:r>
+            <a:r>
+              <a:rPr lang="en-US" sz="1050" dirty="0">
+                <a:solidFill>
+                  <a:srgbClr val="B5CEA8"/>
+                </a:solidFill>
+                <a:latin typeface="Courier New" pitchFamily="34" charset="0"/>
+                <a:ea typeface="Courier New" pitchFamily="34" charset="-122"/>
+                <a:cs typeface="Courier New" pitchFamily="34" charset="-120"/>
+              </a:rPr>
+              <a:t>2</a:t>
+            </a:r>
+            <a:r>
+              <a:rPr lang="en-US" sz="1050" dirty="0">
+                <a:solidFill>
+                  <a:srgbClr val="CCCCCC"/>
+                </a:solidFill>
+                <a:latin typeface="Courier New" pitchFamily="34" charset="0"/>
+                <a:ea typeface="Courier New" pitchFamily="34" charset="-122"/>
+                <a:cs typeface="Courier New" pitchFamily="34" charset="-120"/>
+              </a:rPr>
+              <a:t>)</a:t>
+            </a:r>
+            <a:r>
+              <a:rPr lang="en-US" sz="1050" dirty="0">
+                <a:solidFill>
+                  <a:srgbClr val="CCCCCC"/>
+                </a:solidFill>
+                <a:latin typeface="Courier New" pitchFamily="34" charset="0"/>
+                <a:ea typeface="Courier New" pitchFamily="34" charset="-122"/>
+                <a:cs typeface="Courier New" pitchFamily="34" charset="-120"/>
+              </a:rPr>
+              <a:t>;</a:t>
             </a:r>
             <a:endParaRPr lang="en-US" sz="1050" dirty="0"/>
           </a:p>
@@ -16671,7 +17028,7 @@
                 <a:ea typeface="Courier New" pitchFamily="34" charset="-122"/>
                 <a:cs typeface="Courier New" pitchFamily="34" charset="-120"/>
               </a:rPr>
-              <a:t>cargo_weight</a:t>
+              <a:t>unidade_peso</a:t>
             </a:r>
             <a:r>
               <a:rPr lang="en-US" sz="1050" dirty="0">
@@ -16682,170 +17039,7 @@
                 <a:ea typeface="Courier New" pitchFamily="34" charset="-122"/>
                 <a:cs typeface="Courier New" pitchFamily="34" charset="-120"/>
               </a:rPr>
-              <a:t>      </a:t>
-            </a:r>
-            <a:r>
-              <a:rPr lang="en-US" sz="1050" dirty="0">
-                <a:solidFill>
-                  <a:srgbClr val="CCCCCC"/>
-                </a:solidFill>
-                <a:latin typeface="Courier New" pitchFamily="34" charset="0"/>
-                <a:ea typeface="Courier New" pitchFamily="34" charset="-122"/>
-                <a:cs typeface="Courier New" pitchFamily="34" charset="-120"/>
-              </a:rPr>
-              <a:t>:</a:t>
-            </a:r>
-            <a:r>
-              <a:rPr lang="en-US" sz="1050" dirty="0">
-                <a:solidFill>
-                  <a:srgbClr val="CCCCCC"/>
-                </a:solidFill>
-                <a:latin typeface="Courier New" pitchFamily="34" charset="0"/>
-                <a:ea typeface="Courier New" pitchFamily="34" charset="-122"/>
-                <a:cs typeface="Courier New" pitchFamily="34" charset="-120"/>
-              </a:rPr>
-              <a:t> </a:t>
-            </a:r>
-            <a:r>
-              <a:rPr lang="en-US" sz="1050" dirty="0">
-                <a:solidFill>
-                  <a:srgbClr val="CCCCCC"/>
-                </a:solidFill>
-                <a:latin typeface="Courier New" pitchFamily="34" charset="0"/>
-                <a:ea typeface="Courier New" pitchFamily="34" charset="-122"/>
-                <a:cs typeface="Courier New" pitchFamily="34" charset="-120"/>
-              </a:rPr>
-              <a:t>abap</a:t>
-            </a:r>
-            <a:r>
-              <a:rPr lang="en-US" sz="1050" dirty="0">
-                <a:solidFill>
-                  <a:srgbClr val="CCCCCC"/>
-                </a:solidFill>
-                <a:latin typeface="Courier New" pitchFamily="34" charset="0"/>
-                <a:ea typeface="Courier New" pitchFamily="34" charset="-122"/>
-                <a:cs typeface="Courier New" pitchFamily="34" charset="-120"/>
-              </a:rPr>
-              <a:t>.</a:t>
-            </a:r>
-            <a:r>
-              <a:rPr lang="en-US" sz="1050" dirty="0">
-                <a:solidFill>
-                  <a:srgbClr val="DCDCAA"/>
-                </a:solidFill>
-                <a:latin typeface="Courier New" pitchFamily="34" charset="0"/>
-                <a:ea typeface="Courier New" pitchFamily="34" charset="-122"/>
-                <a:cs typeface="Courier New" pitchFamily="34" charset="-120"/>
-              </a:rPr>
-              <a:t>quan</a:t>
-            </a:r>
-            <a:r>
-              <a:rPr lang="en-US" sz="1050" dirty="0">
-                <a:solidFill>
-                  <a:srgbClr val="CCCCCC"/>
-                </a:solidFill>
-                <a:latin typeface="Courier New" pitchFamily="34" charset="0"/>
-                <a:ea typeface="Courier New" pitchFamily="34" charset="-122"/>
-                <a:cs typeface="Courier New" pitchFamily="34" charset="-120"/>
-              </a:rPr>
-              <a:t>(</a:t>
-            </a:r>
-            <a:r>
-              <a:rPr lang="en-US" sz="1050" dirty="0">
-                <a:solidFill>
-                  <a:srgbClr val="B5CEA8"/>
-                </a:solidFill>
-                <a:latin typeface="Courier New" pitchFamily="34" charset="0"/>
-                <a:ea typeface="Courier New" pitchFamily="34" charset="-122"/>
-                <a:cs typeface="Courier New" pitchFamily="34" charset="-120"/>
-              </a:rPr>
-              <a:t>10</a:t>
-            </a:r>
-            <a:r>
-              <a:rPr lang="en-US" sz="1050" dirty="0">
-                <a:solidFill>
-                  <a:srgbClr val="CCCCCC"/>
-                </a:solidFill>
-                <a:latin typeface="Courier New" pitchFamily="34" charset="0"/>
-                <a:ea typeface="Courier New" pitchFamily="34" charset="-122"/>
-                <a:cs typeface="Courier New" pitchFamily="34" charset="-120"/>
-              </a:rPr>
-              <a:t>,</a:t>
-            </a:r>
-            <a:r>
-              <a:rPr lang="en-US" sz="1050" dirty="0">
-                <a:solidFill>
-                  <a:srgbClr val="B5CEA8"/>
-                </a:solidFill>
-                <a:latin typeface="Courier New" pitchFamily="34" charset="0"/>
-                <a:ea typeface="Courier New" pitchFamily="34" charset="-122"/>
-                <a:cs typeface="Courier New" pitchFamily="34" charset="-120"/>
-              </a:rPr>
-              <a:t>2</a:t>
-            </a:r>
-            <a:r>
-              <a:rPr lang="en-US" sz="1050" dirty="0">
-                <a:solidFill>
-                  <a:srgbClr val="CCCCCC"/>
-                </a:solidFill>
-                <a:latin typeface="Courier New" pitchFamily="34" charset="0"/>
-                <a:ea typeface="Courier New" pitchFamily="34" charset="-122"/>
-                <a:cs typeface="Courier New" pitchFamily="34" charset="-120"/>
-              </a:rPr>
-              <a:t>)</a:t>
-            </a:r>
-            <a:r>
-              <a:rPr lang="en-US" sz="1050" dirty="0">
-                <a:solidFill>
-                  <a:srgbClr val="CCCCCC"/>
-                </a:solidFill>
-                <a:latin typeface="Courier New" pitchFamily="34" charset="0"/>
-                <a:ea typeface="Courier New" pitchFamily="34" charset="-122"/>
-                <a:cs typeface="Courier New" pitchFamily="34" charset="-120"/>
-              </a:rPr>
-              <a:t>;</a:t>
-            </a:r>
-            <a:endParaRPr lang="en-US" sz="1050" dirty="0"/>
-          </a:p>
-          <a:p>
-            <a:pPr indent="0" marL="0">
-              <a:lnSpc>
-                <a:spcPct val="105000"/>
-              </a:lnSpc>
-              <a:buNone/>
-            </a:pPr>
-            <a:r>
-              <a:rPr lang="en-US" sz="1050" dirty="0">
-                <a:solidFill>
-                  <a:srgbClr val="CCCCCC"/>
-                </a:solidFill>
-                <a:latin typeface="Courier New" pitchFamily="34" charset="0"/>
-                <a:ea typeface="Courier New" pitchFamily="34" charset="-122"/>
-                <a:cs typeface="Courier New" pitchFamily="34" charset="-120"/>
-              </a:rPr>
-              <a:t>  </a:t>
-            </a:r>
-            <a:r>
-              <a:rPr lang="en-US" sz="1050" dirty="0">
-                <a:solidFill>
-                  <a:srgbClr val="CCCCCC"/>
-                </a:solidFill>
-                <a:latin typeface="Courier New" pitchFamily="34" charset="0"/>
-                <a:ea typeface="Courier New" pitchFamily="34" charset="-122"/>
-                <a:cs typeface="Courier New" pitchFamily="34" charset="-120"/>
-              </a:rPr>
-              <a:t>weight_unit</a:t>
-            </a:r>
-            <a:r>
-              <a:rPr lang="en-US" sz="1050" dirty="0">
-                <a:solidFill>
-                  <a:srgbClr val="CCCCCC"/>
-                </a:solidFill>
-                <a:latin typeface="Courier New" pitchFamily="34" charset="0"/>
-                <a:ea typeface="Courier New" pitchFamily="34" charset="-122"/>
-                <a:cs typeface="Courier New" pitchFamily="34" charset="-120"/>
-              </a:rPr>
-              <a:t>       </a:t>
+              <a:t>   </a:t>
             </a:r>
             <a:r>
               <a:rPr lang="en-US" sz="1050" dirty="0">
